--- a/curso_es/pptx/S27.pptx
+++ b/curso_es/pptx/S27.pptx
@@ -3799,7 +3799,7 @@
                 </a:solidFill>
                 <a:latin typeface="Nunito Sans"/>
               </a:rPr>
-              <a:t>Kevin sigue a un gamer con dos millones de seguidores. El gamer dice que unas gominolas de vitaminas «te hacen más listo».</a:t>
+              <a:t>Un chico sigue a un gamer con dos millones de seguidores. El gamer dice que unas gominolas de vitaminas «te hacen más listo».</a:t>
             </a:r>
           </a:p>
         </p:txBody>
@@ -4726,7 +4726,7 @@
                 </a:solidFill>
                 <a:latin typeface="Nunito Sans"/>
               </a:rPr>
-              <a:t>Un vídeo del servicio de salud: una médica con bata blanca explica cómo lavarse bien las manos. Omar: «El truco de la bata blanca. Falacia».</a:t>
+              <a:t>Un vídeo del servicio de salud: una médica con bata blanca explica cómo lavarse bien las manos. Un chico: «El truco de la bata blanca. Falacia».</a:t>
             </a:r>
           </a:p>
         </p:txBody>
